--- a/spacerisk/materials/fr/spacerisk-sales-deck.pptx
+++ b/spacerisk/materials/fr/spacerisk-sales-deck.pptx
@@ -3480,7 +3480,7 @@
               </a:defRPr>
             </a:pPr>
             <a:r>
-              <a:t>93 entreprises de démonstration réalistes</a:t>
+              <a:t>91 entreprises de démonstration réalistes</a:t>
             </a:r>
           </a:p>
         </p:txBody>

--- a/spacerisk/materials/fr/spacerisk-sales-deck.pptx
+++ b/spacerisk/materials/fr/spacerisk-sales-deck.pptx
@@ -3480,7 +3480,7 @@
               </a:defRPr>
             </a:pPr>
             <a:r>
-              <a:t>91 entreprises de démonstration réalistes</a:t>
+              <a:t>92 entreprises de démonstration réalistes</a:t>
             </a:r>
           </a:p>
         </p:txBody>

--- a/spacerisk/materials/fr/spacerisk-sales-deck.pptx
+++ b/spacerisk/materials/fr/spacerisk-sales-deck.pptx
@@ -4851,7 +4851,7 @@
               </a:defRPr>
             </a:pPr>
             <a:r>
-              <a:t>Menaces → barrières préventives → événement redouté → barrières de protection → conséquences</a:t>
+              <a:t>Menaces → barrières préventives → événement dangereux → barrières de protection → conséquences</a:t>
             </a:r>
           </a:p>
           <a:p>
